--- a/판매용_템플릿/_판매팩/공동구매_플러스/06_메뉴구조.pptx
+++ b/판매용_템플릿/_판매팩/공동구매_플러스/06_메뉴구조.pptx
@@ -948,7 +948,7 @@
             </a:avLst>
           </a:prstGeom>
           <a:solidFill>
-            <a:srgbClr val="E4762C"/>
+            <a:srgbClr val="BC5918"/>
           </a:solidFill>
           <a:ln/>
         </p:spPr>
@@ -1358,7 +1358,7 @@
             </a:avLst>
           </a:prstGeom>
           <a:solidFill>
-            <a:srgbClr val="E4762C"/>
+            <a:srgbClr val="BC5918"/>
           </a:solidFill>
           <a:ln/>
         </p:spPr>
@@ -1768,7 +1768,7 @@
             </a:avLst>
           </a:prstGeom>
           <a:solidFill>
-            <a:srgbClr val="E4762C"/>
+            <a:srgbClr val="BC5918"/>
           </a:solidFill>
           <a:ln/>
         </p:spPr>
@@ -2178,7 +2178,7 @@
             </a:avLst>
           </a:prstGeom>
           <a:solidFill>
-            <a:srgbClr val="E4762C"/>
+            <a:srgbClr val="BC5918"/>
           </a:solidFill>
           <a:ln/>
         </p:spPr>
@@ -2588,7 +2588,7 @@
             </a:avLst>
           </a:prstGeom>
           <a:solidFill>
-            <a:srgbClr val="E4762C"/>
+            <a:srgbClr val="BC5918"/>
           </a:solidFill>
           <a:ln/>
         </p:spPr>
@@ -2914,7 +2914,7 @@
             </a:avLst>
           </a:prstGeom>
           <a:solidFill>
-            <a:srgbClr val="E4762C"/>
+            <a:srgbClr val="BC5918"/>
           </a:solidFill>
           <a:ln/>
         </p:spPr>
@@ -3240,7 +3240,7 @@
             </a:avLst>
           </a:prstGeom>
           <a:solidFill>
-            <a:srgbClr val="E4762C"/>
+            <a:srgbClr val="BC5918"/>
           </a:solidFill>
           <a:ln/>
         </p:spPr>
@@ -3566,7 +3566,7 @@
             </a:avLst>
           </a:prstGeom>
           <a:solidFill>
-            <a:srgbClr val="E4762C"/>
+            <a:srgbClr val="BC5918"/>
           </a:solidFill>
           <a:ln/>
         </p:spPr>
@@ -4060,7 +4060,7 @@
             </a:avLst>
           </a:prstGeom>
           <a:solidFill>
-            <a:srgbClr val="E4762C"/>
+            <a:srgbClr val="BC5918"/>
           </a:solidFill>
           <a:ln/>
         </p:spPr>
@@ -4386,7 +4386,7 @@
             </a:avLst>
           </a:prstGeom>
           <a:solidFill>
-            <a:srgbClr val="E4762C"/>
+            <a:srgbClr val="BC5918"/>
           </a:solidFill>
           <a:ln/>
         </p:spPr>
